--- a/Presentaties/Sprint 4.pptx
+++ b/Presentaties/Sprint 4.pptx
@@ -136,18 +136,18 @@
   <pc:docChgLst>
     <pc:chgData name="Dax Visser (1110166)" userId="18ef0d71-56ab-4448-86a5-7ac2420fc301" providerId="ADAL" clId="{2C3CF025-71C6-4A79-82F7-3365A43B7B07}"/>
     <pc:docChg chg="custSel modSld">
-      <pc:chgData name="Dax Visser (1110166)" userId="18ef0d71-56ab-4448-86a5-7ac2420fc301" providerId="ADAL" clId="{2C3CF025-71C6-4A79-82F7-3365A43B7B07}" dt="2025-11-25T11:40:28.514" v="27"/>
+      <pc:chgData name="Dax Visser (1110166)" userId="18ef0d71-56ab-4448-86a5-7ac2420fc301" providerId="ADAL" clId="{2C3CF025-71C6-4A79-82F7-3365A43B7B07}" dt="2026-01-06T10:27:26.886" v="28" actId="339"/>
       <pc:docMkLst>
         <pc:docMk/>
       </pc:docMkLst>
       <pc:sldChg chg="addSp modSp mod modAnim">
-        <pc:chgData name="Dax Visser (1110166)" userId="18ef0d71-56ab-4448-86a5-7ac2420fc301" providerId="ADAL" clId="{2C3CF025-71C6-4A79-82F7-3365A43B7B07}" dt="2025-11-25T11:40:28.514" v="27"/>
+        <pc:chgData name="Dax Visser (1110166)" userId="18ef0d71-56ab-4448-86a5-7ac2420fc301" providerId="ADAL" clId="{2C3CF025-71C6-4A79-82F7-3365A43B7B07}" dt="2026-01-06T10:27:26.886" v="28" actId="339"/>
         <pc:sldMkLst>
           <pc:docMk/>
           <pc:sldMk cId="1698587137" sldId="270"/>
         </pc:sldMkLst>
         <pc:graphicFrameChg chg="add mod modGraphic">
-          <ac:chgData name="Dax Visser (1110166)" userId="18ef0d71-56ab-4448-86a5-7ac2420fc301" providerId="ADAL" clId="{2C3CF025-71C6-4A79-82F7-3365A43B7B07}" dt="2025-11-25T11:40:28.514" v="27"/>
+          <ac:chgData name="Dax Visser (1110166)" userId="18ef0d71-56ab-4448-86a5-7ac2420fc301" providerId="ADAL" clId="{2C3CF025-71C6-4A79-82F7-3365A43B7B07}" dt="2026-01-06T10:27:26.886" v="28" actId="339"/>
           <ac:graphicFrameMkLst>
             <pc:docMk/>
             <pc:sldMk cId="1698587137" sldId="270"/>
@@ -3681,7 +3681,7 @@
           <a:p>
             <a:fld id="{4A37A092-F479-4C17-8DAB-26C19D8DEF50}" type="datetimeFigureOut">
               <a:rPr lang="nl-NL" smtClean="0"/>
-              <a:t>25-11-2025</a:t>
+              <a:t>6-1-2026</a:t>
             </a:fld>
             <a:endParaRPr lang="nl-NL"/>
           </a:p>
@@ -3733,7 +3733,7 @@
           <a:p>
             <a:fld id="{D5EC4132-83FF-430E-8473-4C6C1D8D7455}" type="slidenum">
               <a:rPr lang="nl-NL" smtClean="0"/>
-              <a:t>‹#›</a:t>
+              <a:t>‹nr.›</a:t>
             </a:fld>
             <a:endParaRPr lang="nl-NL"/>
           </a:p>
@@ -4015,7 +4015,7 @@
           <a:p>
             <a:fld id="{4A37A092-F479-4C17-8DAB-26C19D8DEF50}" type="datetimeFigureOut">
               <a:rPr lang="nl-NL" smtClean="0"/>
-              <a:t>25-11-2025</a:t>
+              <a:t>6-1-2026</a:t>
             </a:fld>
             <a:endParaRPr lang="nl-NL"/>
           </a:p>
@@ -4057,7 +4057,7 @@
           <a:p>
             <a:fld id="{D5EC4132-83FF-430E-8473-4C6C1D8D7455}" type="slidenum">
               <a:rPr lang="nl-NL" smtClean="0"/>
-              <a:t>‹#›</a:t>
+              <a:t>‹nr.›</a:t>
             </a:fld>
             <a:endParaRPr lang="nl-NL"/>
           </a:p>
@@ -4293,7 +4293,7 @@
           <a:p>
             <a:fld id="{4A37A092-F479-4C17-8DAB-26C19D8DEF50}" type="datetimeFigureOut">
               <a:rPr lang="nl-NL" smtClean="0"/>
-              <a:t>25-11-2025</a:t>
+              <a:t>6-1-2026</a:t>
             </a:fld>
             <a:endParaRPr lang="nl-NL"/>
           </a:p>
@@ -4335,7 +4335,7 @@
           <a:p>
             <a:fld id="{D5EC4132-83FF-430E-8473-4C6C1D8D7455}" type="slidenum">
               <a:rPr lang="nl-NL" smtClean="0"/>
-              <a:t>‹#›</a:t>
+              <a:t>‹nr.›</a:t>
             </a:fld>
             <a:endParaRPr lang="nl-NL"/>
           </a:p>
@@ -4861,7 +4861,7 @@
           <a:p>
             <a:fld id="{4A37A092-F479-4C17-8DAB-26C19D8DEF50}" type="datetimeFigureOut">
               <a:rPr lang="nl-NL" smtClean="0"/>
-              <a:t>25-11-2025</a:t>
+              <a:t>6-1-2026</a:t>
             </a:fld>
             <a:endParaRPr lang="nl-NL"/>
           </a:p>
@@ -4903,7 +4903,7 @@
           <a:p>
             <a:fld id="{D5EC4132-83FF-430E-8473-4C6C1D8D7455}" type="slidenum">
               <a:rPr lang="nl-NL" smtClean="0"/>
-              <a:t>‹#›</a:t>
+              <a:t>‹nr.›</a:t>
             </a:fld>
             <a:endParaRPr lang="nl-NL"/>
           </a:p>
@@ -5139,7 +5139,7 @@
           <a:p>
             <a:fld id="{4A37A092-F479-4C17-8DAB-26C19D8DEF50}" type="datetimeFigureOut">
               <a:rPr lang="nl-NL" smtClean="0"/>
-              <a:t>25-11-2025</a:t>
+              <a:t>6-1-2026</a:t>
             </a:fld>
             <a:endParaRPr lang="nl-NL"/>
           </a:p>
@@ -5181,7 +5181,7 @@
           <a:p>
             <a:fld id="{D5EC4132-83FF-430E-8473-4C6C1D8D7455}" type="slidenum">
               <a:rPr lang="nl-NL" smtClean="0"/>
-              <a:t>‹#›</a:t>
+              <a:t>‹nr.›</a:t>
             </a:fld>
             <a:endParaRPr lang="nl-NL"/>
           </a:p>
@@ -5701,7 +5701,7 @@
           <a:p>
             <a:fld id="{4A37A092-F479-4C17-8DAB-26C19D8DEF50}" type="datetimeFigureOut">
               <a:rPr lang="nl-NL" smtClean="0"/>
-              <a:t>25-11-2025</a:t>
+              <a:t>6-1-2026</a:t>
             </a:fld>
             <a:endParaRPr lang="nl-NL"/>
           </a:p>
@@ -5743,7 +5743,7 @@
           <a:p>
             <a:fld id="{D5EC4132-83FF-430E-8473-4C6C1D8D7455}" type="slidenum">
               <a:rPr lang="nl-NL" smtClean="0"/>
-              <a:t>‹#›</a:t>
+              <a:t>‹nr.›</a:t>
             </a:fld>
             <a:endParaRPr lang="nl-NL"/>
           </a:p>
@@ -6028,7 +6028,7 @@
           <a:p>
             <a:fld id="{4A37A092-F479-4C17-8DAB-26C19D8DEF50}" type="datetimeFigureOut">
               <a:rPr lang="nl-NL" smtClean="0"/>
-              <a:t>25-11-2025</a:t>
+              <a:t>6-1-2026</a:t>
             </a:fld>
             <a:endParaRPr lang="nl-NL"/>
           </a:p>
@@ -6070,7 +6070,7 @@
           <a:p>
             <a:fld id="{D5EC4132-83FF-430E-8473-4C6C1D8D7455}" type="slidenum">
               <a:rPr lang="nl-NL" smtClean="0"/>
-              <a:t>‹#›</a:t>
+              <a:t>‹nr.›</a:t>
             </a:fld>
             <a:endParaRPr lang="nl-NL"/>
           </a:p>
@@ -6205,7 +6205,7 @@
           <a:p>
             <a:fld id="{4A37A092-F479-4C17-8DAB-26C19D8DEF50}" type="datetimeFigureOut">
               <a:rPr lang="nl-NL" smtClean="0"/>
-              <a:t>25-11-2025</a:t>
+              <a:t>6-1-2026</a:t>
             </a:fld>
             <a:endParaRPr lang="nl-NL"/>
           </a:p>
@@ -6247,7 +6247,7 @@
           <a:p>
             <a:fld id="{D5EC4132-83FF-430E-8473-4C6C1D8D7455}" type="slidenum">
               <a:rPr lang="nl-NL" smtClean="0"/>
-              <a:t>‹#›</a:t>
+              <a:t>‹nr.›</a:t>
             </a:fld>
             <a:endParaRPr lang="nl-NL"/>
           </a:p>
@@ -6443,7 +6443,7 @@
           <a:p>
             <a:fld id="{4A37A092-F479-4C17-8DAB-26C19D8DEF50}" type="datetimeFigureOut">
               <a:rPr lang="nl-NL" smtClean="0"/>
-              <a:t>25-11-2025</a:t>
+              <a:t>6-1-2026</a:t>
             </a:fld>
             <a:endParaRPr lang="nl-NL"/>
           </a:p>
@@ -6485,7 +6485,7 @@
           <a:p>
             <a:fld id="{D5EC4132-83FF-430E-8473-4C6C1D8D7455}" type="slidenum">
               <a:rPr lang="nl-NL" smtClean="0"/>
-              <a:t>‹#›</a:t>
+              <a:t>‹nr.›</a:t>
             </a:fld>
             <a:endParaRPr lang="nl-NL"/>
           </a:p>
@@ -6643,7 +6643,7 @@
           <a:p>
             <a:fld id="{4A37A092-F479-4C17-8DAB-26C19D8DEF50}" type="datetimeFigureOut">
               <a:rPr lang="nl-NL" smtClean="0"/>
-              <a:t>25-11-2025</a:t>
+              <a:t>6-1-2026</a:t>
             </a:fld>
             <a:endParaRPr lang="nl-NL"/>
           </a:p>
@@ -6685,7 +6685,7 @@
           <a:p>
             <a:fld id="{D5EC4132-83FF-430E-8473-4C6C1D8D7455}" type="slidenum">
               <a:rPr lang="nl-NL" smtClean="0"/>
-              <a:t>‹#›</a:t>
+              <a:t>‹nr.›</a:t>
             </a:fld>
             <a:endParaRPr lang="nl-NL"/>
           </a:p>
@@ -6919,7 +6919,7 @@
           <a:p>
             <a:fld id="{4A37A092-F479-4C17-8DAB-26C19D8DEF50}" type="datetimeFigureOut">
               <a:rPr lang="nl-NL" smtClean="0"/>
-              <a:t>25-11-2025</a:t>
+              <a:t>6-1-2026</a:t>
             </a:fld>
             <a:endParaRPr lang="nl-NL"/>
           </a:p>
@@ -6961,7 +6961,7 @@
           <a:p>
             <a:fld id="{D5EC4132-83FF-430E-8473-4C6C1D8D7455}" type="slidenum">
               <a:rPr lang="nl-NL" smtClean="0"/>
-              <a:t>‹#›</a:t>
+              <a:t>‹nr.›</a:t>
             </a:fld>
             <a:endParaRPr lang="nl-NL"/>
           </a:p>
@@ -7185,7 +7185,7 @@
           <a:p>
             <a:fld id="{4A37A092-F479-4C17-8DAB-26C19D8DEF50}" type="datetimeFigureOut">
               <a:rPr lang="nl-NL" smtClean="0"/>
-              <a:t>25-11-2025</a:t>
+              <a:t>6-1-2026</a:t>
             </a:fld>
             <a:endParaRPr lang="nl-NL"/>
           </a:p>
@@ -7227,7 +7227,7 @@
           <a:p>
             <a:fld id="{D5EC4132-83FF-430E-8473-4C6C1D8D7455}" type="slidenum">
               <a:rPr lang="nl-NL" smtClean="0"/>
-              <a:t>‹#›</a:t>
+              <a:t>‹nr.›</a:t>
             </a:fld>
             <a:endParaRPr lang="nl-NL"/>
           </a:p>
@@ -7559,7 +7559,7 @@
           <a:p>
             <a:fld id="{4A37A092-F479-4C17-8DAB-26C19D8DEF50}" type="datetimeFigureOut">
               <a:rPr lang="nl-NL" smtClean="0"/>
-              <a:t>25-11-2025</a:t>
+              <a:t>6-1-2026</a:t>
             </a:fld>
             <a:endParaRPr lang="nl-NL"/>
           </a:p>
@@ -7601,7 +7601,7 @@
           <a:p>
             <a:fld id="{D5EC4132-83FF-430E-8473-4C6C1D8D7455}" type="slidenum">
               <a:rPr lang="nl-NL" smtClean="0"/>
-              <a:t>‹#›</a:t>
+              <a:t>‹nr.›</a:t>
             </a:fld>
             <a:endParaRPr lang="nl-NL"/>
           </a:p>
@@ -7707,7 +7707,7 @@
           <a:p>
             <a:fld id="{4A37A092-F479-4C17-8DAB-26C19D8DEF50}" type="datetimeFigureOut">
               <a:rPr lang="nl-NL" smtClean="0"/>
-              <a:t>25-11-2025</a:t>
+              <a:t>6-1-2026</a:t>
             </a:fld>
             <a:endParaRPr lang="nl-NL"/>
           </a:p>
@@ -7749,7 +7749,7 @@
           <a:p>
             <a:fld id="{D5EC4132-83FF-430E-8473-4C6C1D8D7455}" type="slidenum">
               <a:rPr lang="nl-NL" smtClean="0"/>
-              <a:t>‹#›</a:t>
+              <a:t>‹nr.›</a:t>
             </a:fld>
             <a:endParaRPr lang="nl-NL"/>
           </a:p>
@@ -7832,7 +7832,7 @@
           <a:p>
             <a:fld id="{4A37A092-F479-4C17-8DAB-26C19D8DEF50}" type="datetimeFigureOut">
               <a:rPr lang="nl-NL" smtClean="0"/>
-              <a:t>25-11-2025</a:t>
+              <a:t>6-1-2026</a:t>
             </a:fld>
             <a:endParaRPr lang="nl-NL"/>
           </a:p>
@@ -7874,7 +7874,7 @@
           <a:p>
             <a:fld id="{D5EC4132-83FF-430E-8473-4C6C1D8D7455}" type="slidenum">
               <a:rPr lang="nl-NL" smtClean="0"/>
-              <a:t>‹#›</a:t>
+              <a:t>‹nr.›</a:t>
             </a:fld>
             <a:endParaRPr lang="nl-NL"/>
           </a:p>
@@ -8117,7 +8117,7 @@
           <a:p>
             <a:fld id="{4A37A092-F479-4C17-8DAB-26C19D8DEF50}" type="datetimeFigureOut">
               <a:rPr lang="nl-NL" smtClean="0"/>
-              <a:t>25-11-2025</a:t>
+              <a:t>6-1-2026</a:t>
             </a:fld>
             <a:endParaRPr lang="nl-NL"/>
           </a:p>
@@ -8159,7 +8159,7 @@
           <a:p>
             <a:fld id="{D5EC4132-83FF-430E-8473-4C6C1D8D7455}" type="slidenum">
               <a:rPr lang="nl-NL" smtClean="0"/>
-              <a:t>‹#›</a:t>
+              <a:t>‹nr.›</a:t>
             </a:fld>
             <a:endParaRPr lang="nl-NL"/>
           </a:p>
@@ -8441,7 +8441,7 @@
           <a:p>
             <a:fld id="{4A37A092-F479-4C17-8DAB-26C19D8DEF50}" type="datetimeFigureOut">
               <a:rPr lang="nl-NL" smtClean="0"/>
-              <a:t>25-11-2025</a:t>
+              <a:t>6-1-2026</a:t>
             </a:fld>
             <a:endParaRPr lang="nl-NL"/>
           </a:p>
@@ -8483,7 +8483,7 @@
           <a:p>
             <a:fld id="{D5EC4132-83FF-430E-8473-4C6C1D8D7455}" type="slidenum">
               <a:rPr lang="nl-NL" smtClean="0"/>
-              <a:t>‹#›</a:t>
+              <a:t>‹nr.›</a:t>
             </a:fld>
             <a:endParaRPr lang="nl-NL"/>
           </a:p>
@@ -8655,7 +8655,7 @@
           <a:p>
             <a:fld id="{4A37A092-F479-4C17-8DAB-26C19D8DEF50}" type="datetimeFigureOut">
               <a:rPr lang="nl-NL" smtClean="0"/>
-              <a:t>25-11-2025</a:t>
+              <a:t>6-1-2026</a:t>
             </a:fld>
             <a:endParaRPr lang="nl-NL"/>
           </a:p>
@@ -8733,7 +8733,7 @@
           <a:p>
             <a:fld id="{D5EC4132-83FF-430E-8473-4C6C1D8D7455}" type="slidenum">
               <a:rPr lang="nl-NL" smtClean="0"/>
-              <a:t>‹#›</a:t>
+              <a:t>‹nr.›</a:t>
             </a:fld>
             <a:endParaRPr lang="nl-NL"/>
           </a:p>
@@ -10054,14 +10054,14 @@
               <p:nvPr>
                 <p:extLst>
                   <p:ext uri="{D42A27DB-BD31-4B8C-83A1-F6EECF244321}">
-                    <p14:modId xmlns:p14="http://schemas.microsoft.com/office/powerpoint/2010/main" val="559047981"/>
+                    <p14:modId xmlns:p14="http://schemas.microsoft.com/office/powerpoint/2010/main" val="2600396214"/>
                   </p:ext>
                 </p:extLst>
               </p:nvPr>
             </p:nvGraphicFramePr>
             <p:xfrm>
-              <a:off x="5810451" y="474521"/>
-              <a:ext cx="4588600" cy="3422866"/>
+              <a:off x="5865236" y="392585"/>
+              <a:ext cx="4479029" cy="3586737"/>
             </p:xfrm>
             <a:graphic>
               <a:graphicData uri="http://schemas.microsoft.com/office/drawing/2017/model3d">
@@ -10069,7 +10069,7 @@
                   <am3d:spPr>
                     <a:xfrm>
                       <a:off x="0" y="0"/>
-                      <a:ext cx="4588600" cy="3422866"/>
+                      <a:ext cx="4479029" cy="3586737"/>
                     </a:xfrm>
                     <a:prstGeom prst="rect">
                       <a:avLst/>
@@ -10089,7 +10089,7 @@
                       <am3d:sy n="1000000" d="1000000"/>
                       <am3d:sz n="1000000" d="1000000"/>
                     </am3d:scale>
-                    <am3d:rot ax="-2933942" ay="60289" az="-69097"/>
+                    <am3d:rot ax="-2508744" ay="55928" az="-50018"/>
                     <am3d:postTrans dx="0" dy="0" dz="0"/>
                   </am3d:trans>
                   <am3d:raster rName="Office3DRenderer" rVer="16.0.8326">
@@ -10151,8 +10151,8 @@
             </p:blipFill>
             <p:spPr>
               <a:xfrm>
-                <a:off x="5810451" y="474521"/>
-                <a:ext cx="4588600" cy="3422866"/>
+                <a:off x="5865236" y="392585"/>
+                <a:ext cx="4479029" cy="3586737"/>
               </a:xfrm>
               <a:prstGeom prst="rect">
                 <a:avLst/>
@@ -14094,11 +14094,12 @@
 </file>
 
 <file path=customXml/item1.xml><?xml version="1.0" encoding="utf-8"?>
-<p:properties xmlns:p="http://schemas.microsoft.com/office/2006/metadata/properties" xmlns:xsi="http://www.w3.org/2001/XMLSchema-instance" xmlns:pc="http://schemas.microsoft.com/office/infopath/2007/PartnerControls">
-  <documentManagement>
-    <_activity xmlns="8d5dcd13-9b93-4860-8686-258dec0e23be" xsi:nil="true"/>
-  </documentManagement>
-</p:properties>
+<?mso-contentType ?>
+<FormTemplates xmlns="http://schemas.microsoft.com/sharepoint/v3/contenttype/forms">
+  <Display>DocumentLibraryForm</Display>
+  <Edit>DocumentLibraryForm</Edit>
+  <New>DocumentLibraryForm</New>
+</FormTemplates>
 </file>
 
 <file path=customXml/item2.xml><?xml version="1.0" encoding="utf-8"?>
@@ -14296,26 +14297,17 @@
 </file>
 
 <file path=customXml/item3.xml><?xml version="1.0" encoding="utf-8"?>
-<?mso-contentType ?>
-<FormTemplates xmlns="http://schemas.microsoft.com/sharepoint/v3/contenttype/forms">
-  <Display>DocumentLibraryForm</Display>
-  <Edit>DocumentLibraryForm</Edit>
-  <New>DocumentLibraryForm</New>
-</FormTemplates>
+<p:properties xmlns:p="http://schemas.microsoft.com/office/2006/metadata/properties" xmlns:xsi="http://www.w3.org/2001/XMLSchema-instance" xmlns:pc="http://schemas.microsoft.com/office/infopath/2007/PartnerControls">
+  <documentManagement>
+    <_activity xmlns="8d5dcd13-9b93-4860-8686-258dec0e23be" xsi:nil="true"/>
+  </documentManagement>
+</p:properties>
 </file>
 
 <file path=customXml/itemProps1.xml><?xml version="1.0" encoding="utf-8"?>
-<ds:datastoreItem xmlns:ds="http://schemas.openxmlformats.org/officeDocument/2006/customXml" ds:itemID="{6BE63DC0-0E79-4D45-AB99-081F8145E24C}">
+<ds:datastoreItem xmlns:ds="http://schemas.openxmlformats.org/officeDocument/2006/customXml" ds:itemID="{33D4CFAA-434D-4462-B62D-1E23E4045646}">
   <ds:schemaRefs>
-    <ds:schemaRef ds:uri="http://purl.org/dc/terms/"/>
-    <ds:schemaRef ds:uri="http://schemas.microsoft.com/office/infopath/2007/PartnerControls"/>
-    <ds:schemaRef ds:uri="http://schemas.openxmlformats.org/package/2006/metadata/core-properties"/>
-    <ds:schemaRef ds:uri="http://purl.org/dc/elements/1.1/"/>
-    <ds:schemaRef ds:uri="http://schemas.microsoft.com/office/2006/documentManagement/types"/>
-    <ds:schemaRef ds:uri="http://www.w3.org/XML/1998/namespace"/>
-    <ds:schemaRef ds:uri="8d5dcd13-9b93-4860-8686-258dec0e23be"/>
-    <ds:schemaRef ds:uri="http://schemas.microsoft.com/office/2006/metadata/properties"/>
-    <ds:schemaRef ds:uri="http://purl.org/dc/dcmitype/"/>
+    <ds:schemaRef ds:uri="http://schemas.microsoft.com/sharepoint/v3/contenttype/forms"/>
   </ds:schemaRefs>
 </ds:datastoreItem>
 </file>
@@ -14339,9 +14331,17 @@
 </file>
 
 <file path=customXml/itemProps3.xml><?xml version="1.0" encoding="utf-8"?>
-<ds:datastoreItem xmlns:ds="http://schemas.openxmlformats.org/officeDocument/2006/customXml" ds:itemID="{33D4CFAA-434D-4462-B62D-1E23E4045646}">
+<ds:datastoreItem xmlns:ds="http://schemas.openxmlformats.org/officeDocument/2006/customXml" ds:itemID="{6BE63DC0-0E79-4D45-AB99-081F8145E24C}">
   <ds:schemaRefs>
-    <ds:schemaRef ds:uri="http://schemas.microsoft.com/sharepoint/v3/contenttype/forms"/>
+    <ds:schemaRef ds:uri="http://purl.org/dc/terms/"/>
+    <ds:schemaRef ds:uri="http://schemas.microsoft.com/office/infopath/2007/PartnerControls"/>
+    <ds:schemaRef ds:uri="http://schemas.openxmlformats.org/package/2006/metadata/core-properties"/>
+    <ds:schemaRef ds:uri="http://purl.org/dc/elements/1.1/"/>
+    <ds:schemaRef ds:uri="http://schemas.microsoft.com/office/2006/documentManagement/types"/>
+    <ds:schemaRef ds:uri="http://www.w3.org/XML/1998/namespace"/>
+    <ds:schemaRef ds:uri="8d5dcd13-9b93-4860-8686-258dec0e23be"/>
+    <ds:schemaRef ds:uri="http://schemas.microsoft.com/office/2006/metadata/properties"/>
+    <ds:schemaRef ds:uri="http://purl.org/dc/dcmitype/"/>
   </ds:schemaRefs>
 </ds:datastoreItem>
 </file>